--- a/exports/pptx/lessons/primary-module-01-what-is-iks/day-04-ayurveda.pptx
+++ b/exports/pptx/lessons/primary-module-01-what-is-iks/day-04-ayurveda.pptx
@@ -16,9 +16,12 @@
     <p:sldId id="264" r:id="rId10"/>
     <p:sldId id="265" r:id="rId11"/>
     <p:sldId id="266" r:id="rId12"/>
+    <p:sldId id="267" r:id="rId13"/>
+    <p:sldId id="268" r:id="rId14"/>
+    <p:sldId id="269" r:id="rId15"/>
   </p:sldIdLst>
   <p:notesMasterIdLst>
-    <p:notesMasterId r:id="rId13"/>
+    <p:notesMasterId r:id="rId16"/>
   </p:notesMasterIdLst>
   <p:sldSz cx="9144000" cy="5143500"/>
   <p:notesSz cx="5143500" cy="9144000"/>
@@ -712,6 +715,270 @@
             <a:fld id="{F7021451-1387-4CA6-816F-3879F97B5CBC}" type="slidenum">
               <a:rPr lang="en-US"/>
               <a:t>11</a:t>
+            </a:fld>
+            <a:endParaRPr lang="en-US"/>
+          </a:p>
+        </p:txBody>
+      </p:sp>
+    </p:spTree>
+    <p:extLst>
+      <p:ext uri="{BB962C8B-B14F-4D97-AF65-F5344CB8AC3E}">
+        <p14:creationId xmlns:p14="http://schemas.microsoft.com/office/powerpoint/2010/main" val="1024086991"/>
+      </p:ext>
+    </p:extLst>
+  </p:cSld>
+  <p:clrMapOvr>
+    <a:masterClrMapping/>
+  </p:clrMapOvr>
+</p:notes>
+</file>
+
+<file path=ppt/notesSlides/notesSlide12.xml><?xml version="1.0" encoding="utf-8"?>
+<p:notes xmlns:a="http://schemas.openxmlformats.org/drawingml/2006/main" xmlns:r="http://schemas.openxmlformats.org/officeDocument/2006/relationships" xmlns:p="http://schemas.openxmlformats.org/presentationml/2006/main">
+  <p:cSld>
+    <p:spTree>
+      <p:nvGrpSpPr>
+        <p:cNvPr id="1" name=""/>
+        <p:cNvGrpSpPr/>
+        <p:nvPr/>
+      </p:nvGrpSpPr>
+      <p:grpSpPr>
+        <a:xfrm>
+          <a:off x="0" y="0"/>
+          <a:ext cx="0" cy="0"/>
+          <a:chOff x="0" y="0"/>
+          <a:chExt cx="0" cy="0"/>
+        </a:xfrm>
+      </p:grpSpPr>
+      <p:sp>
+        <p:nvSpPr>
+          <p:cNvPr id="2" name="Slide Image Placeholder 1"/>
+          <p:cNvSpPr>
+            <a:spLocks noGrp="1" noRot="1" noChangeAspect="1"/>
+          </p:cNvSpPr>
+          <p:nvPr>
+            <p:ph type="sldImg"/>
+          </p:nvPr>
+        </p:nvSpPr>
+        <p:spPr/>
+      </p:sp>
+      <p:sp>
+        <p:nvSpPr>
+          <p:cNvPr id="3" name="Notes Placeholder 2"/>
+          <p:cNvSpPr>
+            <a:spLocks noGrp="1"/>
+          </p:cNvSpPr>
+          <p:nvPr>
+            <p:ph type="body" idx="1"/>
+          </p:nvPr>
+        </p:nvSpPr>
+        <p:spPr/>
+        <p:txBody>
+          <a:bodyPr/>
+          <a:lstStyle/>
+          <a:p>
+            <a:r>
+              <a:rPr lang="en-US" dirty="0"/>
+              <a:t/>
+            </a:r>
+            <a:endParaRPr lang="en-US" dirty="0"/>
+          </a:p>
+        </p:txBody>
+      </p:sp>
+      <p:sp>
+        <p:nvSpPr>
+          <p:cNvPr id="4" name="Slide Number Placeholder 3"/>
+          <p:cNvSpPr>
+            <a:spLocks noGrp="1"/>
+          </p:cNvSpPr>
+          <p:nvPr>
+            <p:ph type="sldNum" sz="quarter" idx="10"/>
+          </p:nvPr>
+        </p:nvSpPr>
+        <p:spPr/>
+        <p:txBody>
+          <a:bodyPr/>
+          <a:lstStyle/>
+          <a:p>
+            <a:fld id="{F7021451-1387-4CA6-816F-3879F97B5CBC}" type="slidenum">
+              <a:rPr lang="en-US"/>
+              <a:t>12</a:t>
+            </a:fld>
+            <a:endParaRPr lang="en-US"/>
+          </a:p>
+        </p:txBody>
+      </p:sp>
+    </p:spTree>
+    <p:extLst>
+      <p:ext uri="{BB962C8B-B14F-4D97-AF65-F5344CB8AC3E}">
+        <p14:creationId xmlns:p14="http://schemas.microsoft.com/office/powerpoint/2010/main" val="1024086991"/>
+      </p:ext>
+    </p:extLst>
+  </p:cSld>
+  <p:clrMapOvr>
+    <a:masterClrMapping/>
+  </p:clrMapOvr>
+</p:notes>
+</file>
+
+<file path=ppt/notesSlides/notesSlide13.xml><?xml version="1.0" encoding="utf-8"?>
+<p:notes xmlns:a="http://schemas.openxmlformats.org/drawingml/2006/main" xmlns:r="http://schemas.openxmlformats.org/officeDocument/2006/relationships" xmlns:p="http://schemas.openxmlformats.org/presentationml/2006/main">
+  <p:cSld>
+    <p:spTree>
+      <p:nvGrpSpPr>
+        <p:cNvPr id="1" name=""/>
+        <p:cNvGrpSpPr/>
+        <p:nvPr/>
+      </p:nvGrpSpPr>
+      <p:grpSpPr>
+        <a:xfrm>
+          <a:off x="0" y="0"/>
+          <a:ext cx="0" cy="0"/>
+          <a:chOff x="0" y="0"/>
+          <a:chExt cx="0" cy="0"/>
+        </a:xfrm>
+      </p:grpSpPr>
+      <p:sp>
+        <p:nvSpPr>
+          <p:cNvPr id="2" name="Slide Image Placeholder 1"/>
+          <p:cNvSpPr>
+            <a:spLocks noGrp="1" noRot="1" noChangeAspect="1"/>
+          </p:cNvSpPr>
+          <p:nvPr>
+            <p:ph type="sldImg"/>
+          </p:nvPr>
+        </p:nvSpPr>
+        <p:spPr/>
+      </p:sp>
+      <p:sp>
+        <p:nvSpPr>
+          <p:cNvPr id="3" name="Notes Placeholder 2"/>
+          <p:cNvSpPr>
+            <a:spLocks noGrp="1"/>
+          </p:cNvSpPr>
+          <p:nvPr>
+            <p:ph type="body" idx="1"/>
+          </p:nvPr>
+        </p:nvSpPr>
+        <p:spPr/>
+        <p:txBody>
+          <a:bodyPr/>
+          <a:lstStyle/>
+          <a:p>
+            <a:r>
+              <a:rPr lang="en-US" dirty="0"/>
+              <a:t/>
+            </a:r>
+            <a:endParaRPr lang="en-US" dirty="0"/>
+          </a:p>
+        </p:txBody>
+      </p:sp>
+      <p:sp>
+        <p:nvSpPr>
+          <p:cNvPr id="4" name="Slide Number Placeholder 3"/>
+          <p:cNvSpPr>
+            <a:spLocks noGrp="1"/>
+          </p:cNvSpPr>
+          <p:nvPr>
+            <p:ph type="sldNum" sz="quarter" idx="10"/>
+          </p:nvPr>
+        </p:nvSpPr>
+        <p:spPr/>
+        <p:txBody>
+          <a:bodyPr/>
+          <a:lstStyle/>
+          <a:p>
+            <a:fld id="{F7021451-1387-4CA6-816F-3879F97B5CBC}" type="slidenum">
+              <a:rPr lang="en-US"/>
+              <a:t>13</a:t>
+            </a:fld>
+            <a:endParaRPr lang="en-US"/>
+          </a:p>
+        </p:txBody>
+      </p:sp>
+    </p:spTree>
+    <p:extLst>
+      <p:ext uri="{BB962C8B-B14F-4D97-AF65-F5344CB8AC3E}">
+        <p14:creationId xmlns:p14="http://schemas.microsoft.com/office/powerpoint/2010/main" val="1024086991"/>
+      </p:ext>
+    </p:extLst>
+  </p:cSld>
+  <p:clrMapOvr>
+    <a:masterClrMapping/>
+  </p:clrMapOvr>
+</p:notes>
+</file>
+
+<file path=ppt/notesSlides/notesSlide14.xml><?xml version="1.0" encoding="utf-8"?>
+<p:notes xmlns:a="http://schemas.openxmlformats.org/drawingml/2006/main" xmlns:r="http://schemas.openxmlformats.org/officeDocument/2006/relationships" xmlns:p="http://schemas.openxmlformats.org/presentationml/2006/main">
+  <p:cSld>
+    <p:spTree>
+      <p:nvGrpSpPr>
+        <p:cNvPr id="1" name=""/>
+        <p:cNvGrpSpPr/>
+        <p:nvPr/>
+      </p:nvGrpSpPr>
+      <p:grpSpPr>
+        <a:xfrm>
+          <a:off x="0" y="0"/>
+          <a:ext cx="0" cy="0"/>
+          <a:chOff x="0" y="0"/>
+          <a:chExt cx="0" cy="0"/>
+        </a:xfrm>
+      </p:grpSpPr>
+      <p:sp>
+        <p:nvSpPr>
+          <p:cNvPr id="2" name="Slide Image Placeholder 1"/>
+          <p:cNvSpPr>
+            <a:spLocks noGrp="1" noRot="1" noChangeAspect="1"/>
+          </p:cNvSpPr>
+          <p:nvPr>
+            <p:ph type="sldImg"/>
+          </p:nvPr>
+        </p:nvSpPr>
+        <p:spPr/>
+      </p:sp>
+      <p:sp>
+        <p:nvSpPr>
+          <p:cNvPr id="3" name="Notes Placeholder 2"/>
+          <p:cNvSpPr>
+            <a:spLocks noGrp="1"/>
+          </p:cNvSpPr>
+          <p:nvPr>
+            <p:ph type="body" idx="1"/>
+          </p:nvPr>
+        </p:nvSpPr>
+        <p:spPr/>
+        <p:txBody>
+          <a:bodyPr/>
+          <a:lstStyle/>
+          <a:p>
+            <a:r>
+              <a:rPr lang="en-US" dirty="0"/>
+              <a:t/>
+            </a:r>
+            <a:endParaRPr lang="en-US" dirty="0"/>
+          </a:p>
+        </p:txBody>
+      </p:sp>
+      <p:sp>
+        <p:nvSpPr>
+          <p:cNvPr id="4" name="Slide Number Placeholder 3"/>
+          <p:cNvSpPr>
+            <a:spLocks noGrp="1"/>
+          </p:cNvSpPr>
+          <p:nvPr>
+            <p:ph type="sldNum" sz="quarter" idx="10"/>
+          </p:nvPr>
+        </p:nvSpPr>
+        <p:spPr/>
+        <p:txBody>
+          <a:bodyPr/>
+          <a:lstStyle/>
+          <a:p>
+            <a:fld id="{F7021451-1387-4CA6-816F-3879F97B5CBC}" type="slidenum">
+              <a:rPr lang="en-US"/>
+              <a:t>14</a:t>
             </a:fld>
             <a:endParaRPr lang="en-US"/>
           </a:p>
@@ -1965,102 +2232,6 @@
         </p:nvSpPr>
         <p:spPr>
           <a:xfrm>
-            <a:off x="406301" y="1223963"/>
-            <a:ext cx="8498026" cy="274290"/>
-          </a:xfrm>
-          <a:prstGeom prst="rect">
-            <a:avLst/>
-          </a:prstGeom>
-          <a:noFill/>
-          <a:ln/>
-        </p:spPr>
-        <p:txBody>
-          <a:bodyPr wrap="square" lIns="0" tIns="0" rIns="0" bIns="0" rtlCol="0" anchor="t"/>
-          <a:lstStyle/>
-          <a:p>
-            <a:pPr algn="l" indent="0" marL="0">
-              <a:lnSpc>
-                <a:spcPts val="2160"/>
-              </a:lnSpc>
-              <a:spcBef>
-                <a:spcPts val="600"/>
-              </a:spcBef>
-              <a:spcAft>
-                <a:spcPts val="800"/>
-              </a:spcAft>
-              <a:buNone/>
-            </a:pPr>
-            <a:r>
-              <a:rPr lang="en-US" sz="1800" b="1" dirty="0">
-                <a:solidFill>
-                  <a:srgbClr val="E07A5F"/>
-                </a:solidFill>
-                <a:latin typeface="Georgia" pitchFamily="34" charset="0"/>
-                <a:ea typeface="Georgia" pitchFamily="34" charset="-122"/>
-                <a:cs typeface="Georgia" pitchFamily="34" charset="-120"/>
-              </a:rPr>
-              <a:t>Goal</a:t>
-            </a:r>
-            <a:endParaRPr lang="en-US" sz="1800" dirty="0"/>
-          </a:p>
-        </p:txBody>
-      </p:sp>
-      <p:sp>
-        <p:nvSpPr>
-          <p:cNvPr id="6" name="Text 4"/>
-          <p:cNvSpPr/>
-          <p:nvPr/>
-        </p:nvSpPr>
-        <p:spPr>
-          <a:xfrm>
-            <a:off x="406301" y="1637854"/>
-            <a:ext cx="8498026" cy="213271"/>
-          </a:xfrm>
-          <a:prstGeom prst="rect">
-            <a:avLst/>
-          </a:prstGeom>
-          <a:noFill/>
-          <a:ln/>
-        </p:spPr>
-        <p:txBody>
-          <a:bodyPr wrap="square" lIns="0" tIns="0" rIns="0" bIns="0" rtlCol="0" anchor="t"/>
-          <a:lstStyle/>
-          <a:p>
-            <a:pPr algn="l" indent="0" marL="0">
-              <a:lnSpc>
-                <a:spcPts val="1680"/>
-              </a:lnSpc>
-              <a:spcBef>
-                <a:spcPts val="300"/>
-              </a:spcBef>
-              <a:spcAft>
-                <a:spcPts val="300"/>
-              </a:spcAft>
-              <a:buNone/>
-            </a:pPr>
-            <a:r>
-              <a:rPr lang="en-US" sz="1200" dirty="0">
-                <a:solidFill>
-                  <a:srgbClr val="2C2C2C"/>
-                </a:solidFill>
-                <a:latin typeface="Verdana" pitchFamily="34" charset="0"/>
-                <a:ea typeface="Verdana" pitchFamily="34" charset="-122"/>
-                <a:cs typeface="Verdana" pitchFamily="34" charset="-120"/>
-              </a:rPr>
-              <a:t>Children meet the three doshas (vāta, pitta, kapha) as "three friends in your body."</a:t>
-            </a:r>
-            <a:endParaRPr lang="en-US" sz="1200" dirty="0"/>
-          </a:p>
-        </p:txBody>
-      </p:sp>
-      <p:sp>
-        <p:nvSpPr>
-          <p:cNvPr id="7" name="Text 5"/>
-          <p:cNvSpPr/>
-          <p:nvPr/>
-        </p:nvSpPr>
-        <p:spPr>
-          <a:xfrm>
             <a:off x="406301" y="4434929"/>
             <a:ext cx="8498026" cy="213271"/>
           </a:xfrm>
@@ -2205,7 +2376,7 @@
                 <a:ea typeface="Georgia" pitchFamily="34" charset="-122"/>
                 <a:cs typeface="Georgia" pitchFamily="34" charset="-120"/>
               </a:rPr>
-              <a:t>Differentiation</a:t>
+              <a:t>Show + chant (3 min)</a:t>
             </a:r>
             <a:endParaRPr lang="en-US" sz="1800" dirty="0"/>
           </a:p>
@@ -2243,7 +2414,7 @@
               <a:buChar char="•"/>
             </a:pPr>
             <a:r>
-              <a:rPr lang="en-US" sz="1200" b="1" dirty="0">
+              <a:rPr lang="en-US" sz="1200" dirty="0">
                 <a:solidFill>
                   <a:srgbClr val="2C2C2C"/>
                 </a:solidFill>
@@ -2251,16 +2422,20 @@
                 <a:ea typeface="Verdana" pitchFamily="34" charset="-122"/>
                 <a:cs typeface="Verdana" pitchFamily="34" charset="-120"/>
               </a:rPr>
-              <a:t>Tier up:</a:t>
-            </a:r>
-            <a:pPr algn="l" indent="0" marL="0">
+              <a:t>2 shares.</a:t>
+            </a:r>
+            <a:endParaRPr lang="en-US" sz="1200" dirty="0"/>
+          </a:p>
+          <a:p>
+            <a:pPr algn="l" marL="342900" indent="-342900">
               <a:lnSpc>
                 <a:spcPts val="1620"/>
               </a:lnSpc>
               <a:spcAft>
                 <a:spcPts val="300"/>
               </a:spcAft>
-              <a:buNone/>
+              <a:buSzPct val="100000"/>
+              <a:buChar char="•"/>
             </a:pPr>
             <a:r>
               <a:rPr lang="en-US" sz="1200" dirty="0">
@@ -2271,51 +2446,7 @@
                 <a:ea typeface="Verdana" pitchFamily="34" charset="-122"/>
                 <a:cs typeface="Verdana" pitchFamily="34" charset="-120"/>
               </a:rPr>
-              <a:t> Make up a story about the three friends having a small argument and making up.</a:t>
-            </a:r>
-            <a:endParaRPr lang="en-US" sz="1200" dirty="0"/>
-          </a:p>
-          <a:p>
-            <a:pPr algn="l" marL="342900" indent="-342900">
-              <a:lnSpc>
-                <a:spcPts val="1620"/>
-              </a:lnSpc>
-              <a:spcAft>
-                <a:spcPts val="300"/>
-              </a:spcAft>
-              <a:buSzPct val="100000"/>
-              <a:buChar char="•"/>
-            </a:pPr>
-            <a:r>
-              <a:rPr lang="en-US" sz="1200" b="1" dirty="0">
-                <a:solidFill>
-                  <a:srgbClr val="2C2C2C"/>
-                </a:solidFill>
-                <a:latin typeface="Verdana" pitchFamily="34" charset="0"/>
-                <a:ea typeface="Verdana" pitchFamily="34" charset="-122"/>
-                <a:cs typeface="Verdana" pitchFamily="34" charset="-120"/>
-              </a:rPr>
-              <a:t>Tier down:</a:t>
-            </a:r>
-            <a:pPr algn="l" indent="0" marL="0">
-              <a:lnSpc>
-                <a:spcPts val="1620"/>
-              </a:lnSpc>
-              <a:spcAft>
-                <a:spcPts val="300"/>
-              </a:spcAft>
-              <a:buNone/>
-            </a:pPr>
-            <a:r>
-              <a:rPr lang="en-US" sz="1200" dirty="0">
-                <a:solidFill>
-                  <a:srgbClr val="2C2C2C"/>
-                </a:solidFill>
-                <a:latin typeface="Verdana" pitchFamily="34" charset="0"/>
-                <a:ea typeface="Verdana" pitchFamily="34" charset="-122"/>
-                <a:cs typeface="Verdana" pitchFamily="34" charset="-120"/>
-              </a:rPr>
-              <a:t> Draw just one friend.</a:t>
+              <a:t>Chant.</a:t>
             </a:r>
             <a:endParaRPr lang="en-US" sz="1200" dirty="0"/>
           </a:p>
@@ -2473,7 +2604,7 @@
                 <a:ea typeface="Georgia" pitchFamily="34" charset="-122"/>
                 <a:cs typeface="Georgia" pitchFamily="34" charset="-120"/>
               </a:rPr>
-              <a:t>Teacher notes</a:t>
+              <a:t>Wrap-up (2 min)</a:t>
             </a:r>
             <a:endParaRPr lang="en-US" sz="1800" dirty="0"/>
           </a:p>
@@ -2487,8 +2618,8 @@
         </p:nvSpPr>
         <p:spPr>
           <a:xfrm>
-            <a:off x="406301" y="870942"/>
-            <a:ext cx="8498026" cy="426541"/>
+            <a:off x="634901" y="883593"/>
+            <a:ext cx="8102798" cy="281880"/>
           </a:xfrm>
           <a:prstGeom prst="rect">
             <a:avLst/>
@@ -2500,20 +2631,18 @@
           <a:bodyPr wrap="square" lIns="0" tIns="0" rIns="0" bIns="0" rtlCol="0" anchor="t"/>
           <a:lstStyle/>
           <a:p>
-            <a:pPr algn="l" indent="0" marL="0">
-              <a:lnSpc>
-                <a:spcPts val="1680"/>
-              </a:lnSpc>
-              <a:spcBef>
-                <a:spcPts val="300"/>
-              </a:spcBef>
-              <a:spcAft>
-                <a:spcPts val="300"/>
-              </a:spcAft>
-              <a:buNone/>
-            </a:pPr>
-            <a:r>
-              <a:rPr lang="en-US" sz="1200" dirty="0">
+            <a:pPr algn="l" marL="342900" indent="-342900">
+              <a:lnSpc>
+                <a:spcPts val="1620"/>
+              </a:lnSpc>
+              <a:spcAft>
+                <a:spcPts val="300"/>
+              </a:spcAft>
+              <a:buSzPct val="100000"/>
+              <a:buChar char="•"/>
+            </a:pPr>
+            <a:r>
+              <a:rPr lang="en-US" sz="1200" i="1" dirty="0">
                 <a:solidFill>
                   <a:srgbClr val="2C2C2C"/>
                 </a:solidFill>
@@ -2521,7 +2650,707 @@
                 <a:ea typeface="Verdana" pitchFamily="34" charset="-122"/>
                 <a:cs typeface="Verdana" pitchFamily="34" charset="-120"/>
               </a:rPr>
-              <a:t>– Module 3 (Ayurveda + Good Health) is the FULL Ayurveda module. Today is a taste. – Don't push children to identify their "type" — at this age it's just an introduction.</a:t>
+              <a:t>"Tomorrow we sing about all 5 gifts together!"</a:t>
+            </a:r>
+            <a:endParaRPr lang="en-US" sz="1200" dirty="0"/>
+          </a:p>
+        </p:txBody>
+      </p:sp>
+      <p:sp>
+        <p:nvSpPr>
+          <p:cNvPr id="5" name="Text 3"/>
+          <p:cNvSpPr/>
+          <p:nvPr/>
+        </p:nvSpPr>
+        <p:spPr>
+          <a:xfrm>
+            <a:off x="406301" y="4434929"/>
+            <a:ext cx="8498026" cy="213271"/>
+          </a:xfrm>
+          <a:prstGeom prst="rect">
+            <a:avLst/>
+          </a:prstGeom>
+          <a:noFill/>
+          <a:ln/>
+        </p:spPr>
+        <p:txBody>
+          <a:bodyPr wrap="square" lIns="0" tIns="0" rIns="0" bIns="0" rtlCol="0" anchor="t"/>
+          <a:lstStyle/>
+          <a:p>
+            <a:pPr algn="l" indent="0" marL="0">
+              <a:lnSpc>
+                <a:spcPts val="1680"/>
+              </a:lnSpc>
+              <a:spcBef>
+                <a:spcPts val="300"/>
+              </a:spcBef>
+              <a:spcAft>
+                <a:spcPts val="300"/>
+              </a:spcAft>
+              <a:buNone/>
+            </a:pPr>
+            <a:r>
+              <a:rPr lang="en-US" sz="1200" dirty="0">
+                <a:solidFill>
+                  <a:srgbClr val="2C2C2C"/>
+                </a:solidFill>
+                <a:latin typeface="Verdana" pitchFamily="34" charset="0"/>
+                <a:ea typeface="Verdana" pitchFamily="34" charset="-122"/>
+                <a:cs typeface="Verdana" pitchFamily="34" charset="-120"/>
+              </a:rPr>
+              <a:t>Primary ·  · IKS Curriculum</a:t>
+            </a:r>
+            <a:endParaRPr lang="en-US" sz="1200" dirty="0"/>
+          </a:p>
+        </p:txBody>
+      </p:sp>
+    </p:spTree>
+  </p:cSld>
+  <p:clrMapOvr>
+    <a:masterClrMapping/>
+  </p:clrMapOvr>
+</p:sld>
+</file>
+
+<file path=ppt/slides/slide12.xml><?xml version="1.0" encoding="utf-8"?>
+<p:sld xmlns:a="http://schemas.openxmlformats.org/drawingml/2006/main" xmlns:r="http://schemas.openxmlformats.org/officeDocument/2006/relationships" xmlns:p="http://schemas.openxmlformats.org/presentationml/2006/main">
+  <p:cSld name="Slide 12">
+    <p:bg>
+      <p:bgPr>
+        <a:solidFill>
+          <a:srgbClr val="FAF7F2"/>
+        </a:solidFill>
+      </p:bgPr>
+    </p:bg>
+    <p:spTree>
+      <p:nvGrpSpPr>
+        <p:cNvPr id="1" name=""/>
+        <p:cNvGrpSpPr/>
+        <p:nvPr/>
+      </p:nvGrpSpPr>
+      <p:grpSpPr>
+        <a:xfrm>
+          <a:off x="0" y="0"/>
+          <a:ext cx="0" cy="0"/>
+          <a:chOff x="0" y="0"/>
+          <a:chExt cx="0" cy="0"/>
+        </a:xfrm>
+      </p:grpSpPr>
+      <p:sp>
+        <p:nvSpPr>
+          <p:cNvPr id="2" name="Text 0"/>
+          <p:cNvSpPr/>
+          <p:nvPr/>
+        </p:nvSpPr>
+        <p:spPr>
+          <a:xfrm>
+            <a:off x="0" y="0"/>
+            <a:ext cx="9144000" cy="101501"/>
+          </a:xfrm>
+          <a:prstGeom prst="rect">
+            <a:avLst/>
+          </a:prstGeom>
+          <a:solidFill>
+            <a:srgbClr val="87A96B"/>
+          </a:solidFill>
+          <a:ln/>
+        </p:spPr>
+        <p:txBody>
+          <a:bodyPr wrap="square" rtlCol="0" anchor="ctr"/>
+          <a:lstStyle/>
+          <a:p>
+            <a:pPr indent="0" marL="0">
+              <a:buNone/>
+            </a:pPr>
+            <a:endParaRPr lang="en-US" dirty="0"/>
+          </a:p>
+        </p:txBody>
+      </p:sp>
+      <p:sp>
+        <p:nvSpPr>
+          <p:cNvPr id="3" name="Text 1"/>
+          <p:cNvSpPr/>
+          <p:nvPr/>
+        </p:nvSpPr>
+        <p:spPr>
+          <a:xfrm>
+            <a:off x="406301" y="457051"/>
+            <a:ext cx="8498026" cy="274290"/>
+          </a:xfrm>
+          <a:prstGeom prst="rect">
+            <a:avLst/>
+          </a:prstGeom>
+          <a:noFill/>
+          <a:ln/>
+        </p:spPr>
+        <p:txBody>
+          <a:bodyPr wrap="square" lIns="0" tIns="0" rIns="0" bIns="0" rtlCol="0" anchor="t"/>
+          <a:lstStyle/>
+          <a:p>
+            <a:pPr algn="l" indent="0" marL="0">
+              <a:lnSpc>
+                <a:spcPts val="2160"/>
+              </a:lnSpc>
+              <a:spcBef>
+                <a:spcPts val="600"/>
+              </a:spcBef>
+              <a:spcAft>
+                <a:spcPts val="800"/>
+              </a:spcAft>
+              <a:buNone/>
+            </a:pPr>
+            <a:r>
+              <a:rPr lang="en-US" sz="1800" b="1" dirty="0">
+                <a:solidFill>
+                  <a:srgbClr val="E07A5F"/>
+                </a:solidFill>
+                <a:latin typeface="Georgia" pitchFamily="34" charset="0"/>
+                <a:ea typeface="Georgia" pitchFamily="34" charset="-122"/>
+                <a:cs typeface="Georgia" pitchFamily="34" charset="-120"/>
+              </a:rPr>
+              <a:t>Homework</a:t>
+            </a:r>
+            <a:endParaRPr lang="en-US" sz="1800" dirty="0"/>
+          </a:p>
+        </p:txBody>
+      </p:sp>
+      <p:sp>
+        <p:nvSpPr>
+          <p:cNvPr id="4" name="Text 2"/>
+          <p:cNvSpPr/>
+          <p:nvPr/>
+        </p:nvSpPr>
+        <p:spPr>
+          <a:xfrm>
+            <a:off x="634901" y="883593"/>
+            <a:ext cx="8102798" cy="281880"/>
+          </a:xfrm>
+          <a:prstGeom prst="rect">
+            <a:avLst/>
+          </a:prstGeom>
+          <a:noFill/>
+          <a:ln/>
+        </p:spPr>
+        <p:txBody>
+          <a:bodyPr wrap="square" lIns="0" tIns="0" rIns="0" bIns="0" rtlCol="0" anchor="t"/>
+          <a:lstStyle/>
+          <a:p>
+            <a:pPr algn="l" marL="342900" indent="-342900">
+              <a:lnSpc>
+                <a:spcPts val="1620"/>
+              </a:lnSpc>
+              <a:spcAft>
+                <a:spcPts val="300"/>
+              </a:spcAft>
+              <a:buSzPct val="100000"/>
+              <a:buChar char="•"/>
+            </a:pPr>
+            <a:r>
+              <a:rPr lang="en-US" sz="1200" dirty="0">
+                <a:solidFill>
+                  <a:srgbClr val="2C2C2C"/>
+                </a:solidFill>
+                <a:latin typeface="Verdana" pitchFamily="34" charset="0"/>
+                <a:ea typeface="Verdana" pitchFamily="34" charset="-122"/>
+                <a:cs typeface="Verdana" pitchFamily="34" charset="-120"/>
+              </a:rPr>
+              <a:t>Ask a parent: which of the three friends do they think is YOUR favourite?</a:t>
+            </a:r>
+            <a:endParaRPr lang="en-US" sz="1200" dirty="0"/>
+          </a:p>
+        </p:txBody>
+      </p:sp>
+      <p:sp>
+        <p:nvSpPr>
+          <p:cNvPr id="5" name="Text 3"/>
+          <p:cNvSpPr/>
+          <p:nvPr/>
+        </p:nvSpPr>
+        <p:spPr>
+          <a:xfrm>
+            <a:off x="406301" y="4434929"/>
+            <a:ext cx="8498026" cy="213271"/>
+          </a:xfrm>
+          <a:prstGeom prst="rect">
+            <a:avLst/>
+          </a:prstGeom>
+          <a:noFill/>
+          <a:ln/>
+        </p:spPr>
+        <p:txBody>
+          <a:bodyPr wrap="square" lIns="0" tIns="0" rIns="0" bIns="0" rtlCol="0" anchor="t"/>
+          <a:lstStyle/>
+          <a:p>
+            <a:pPr algn="l" indent="0" marL="0">
+              <a:lnSpc>
+                <a:spcPts val="1680"/>
+              </a:lnSpc>
+              <a:spcBef>
+                <a:spcPts val="300"/>
+              </a:spcBef>
+              <a:spcAft>
+                <a:spcPts val="300"/>
+              </a:spcAft>
+              <a:buNone/>
+            </a:pPr>
+            <a:r>
+              <a:rPr lang="en-US" sz="1200" dirty="0">
+                <a:solidFill>
+                  <a:srgbClr val="2C2C2C"/>
+                </a:solidFill>
+                <a:latin typeface="Verdana" pitchFamily="34" charset="0"/>
+                <a:ea typeface="Verdana" pitchFamily="34" charset="-122"/>
+                <a:cs typeface="Verdana" pitchFamily="34" charset="-120"/>
+              </a:rPr>
+              <a:t>Primary ·  · IKS Curriculum</a:t>
+            </a:r>
+            <a:endParaRPr lang="en-US" sz="1200" dirty="0"/>
+          </a:p>
+        </p:txBody>
+      </p:sp>
+    </p:spTree>
+  </p:cSld>
+  <p:clrMapOvr>
+    <a:masterClrMapping/>
+  </p:clrMapOvr>
+</p:sld>
+</file>
+
+<file path=ppt/slides/slide13.xml><?xml version="1.0" encoding="utf-8"?>
+<p:sld xmlns:a="http://schemas.openxmlformats.org/drawingml/2006/main" xmlns:r="http://schemas.openxmlformats.org/officeDocument/2006/relationships" xmlns:p="http://schemas.openxmlformats.org/presentationml/2006/main">
+  <p:cSld name="Slide 13">
+    <p:bg>
+      <p:bgPr>
+        <a:solidFill>
+          <a:srgbClr val="FAF7F2"/>
+        </a:solidFill>
+      </p:bgPr>
+    </p:bg>
+    <p:spTree>
+      <p:nvGrpSpPr>
+        <p:cNvPr id="1" name=""/>
+        <p:cNvGrpSpPr/>
+        <p:nvPr/>
+      </p:nvGrpSpPr>
+      <p:grpSpPr>
+        <a:xfrm>
+          <a:off x="0" y="0"/>
+          <a:ext cx="0" cy="0"/>
+          <a:chOff x="0" y="0"/>
+          <a:chExt cx="0" cy="0"/>
+        </a:xfrm>
+      </p:grpSpPr>
+      <p:sp>
+        <p:nvSpPr>
+          <p:cNvPr id="2" name="Text 0"/>
+          <p:cNvSpPr/>
+          <p:nvPr/>
+        </p:nvSpPr>
+        <p:spPr>
+          <a:xfrm>
+            <a:off x="0" y="0"/>
+            <a:ext cx="9144000" cy="101501"/>
+          </a:xfrm>
+          <a:prstGeom prst="rect">
+            <a:avLst/>
+          </a:prstGeom>
+          <a:solidFill>
+            <a:srgbClr val="87A96B"/>
+          </a:solidFill>
+          <a:ln/>
+        </p:spPr>
+        <p:txBody>
+          <a:bodyPr wrap="square" rtlCol="0" anchor="ctr"/>
+          <a:lstStyle/>
+          <a:p>
+            <a:pPr indent="0" marL="0">
+              <a:buNone/>
+            </a:pPr>
+            <a:endParaRPr lang="en-US" dirty="0"/>
+          </a:p>
+        </p:txBody>
+      </p:sp>
+      <p:sp>
+        <p:nvSpPr>
+          <p:cNvPr id="3" name="Text 1"/>
+          <p:cNvSpPr/>
+          <p:nvPr/>
+        </p:nvSpPr>
+        <p:spPr>
+          <a:xfrm>
+            <a:off x="406301" y="457051"/>
+            <a:ext cx="8498026" cy="274290"/>
+          </a:xfrm>
+          <a:prstGeom prst="rect">
+            <a:avLst/>
+          </a:prstGeom>
+          <a:noFill/>
+          <a:ln/>
+        </p:spPr>
+        <p:txBody>
+          <a:bodyPr wrap="square" lIns="0" tIns="0" rIns="0" bIns="0" rtlCol="0" anchor="t"/>
+          <a:lstStyle/>
+          <a:p>
+            <a:pPr algn="l" indent="0" marL="0">
+              <a:lnSpc>
+                <a:spcPts val="2160"/>
+              </a:lnSpc>
+              <a:spcBef>
+                <a:spcPts val="600"/>
+              </a:spcBef>
+              <a:spcAft>
+                <a:spcPts val="800"/>
+              </a:spcAft>
+              <a:buNone/>
+            </a:pPr>
+            <a:r>
+              <a:rPr lang="en-US" sz="1800" b="1" dirty="0">
+                <a:solidFill>
+                  <a:srgbClr val="E07A5F"/>
+                </a:solidFill>
+                <a:latin typeface="Georgia" pitchFamily="34" charset="0"/>
+                <a:ea typeface="Georgia" pitchFamily="34" charset="-122"/>
+                <a:cs typeface="Georgia" pitchFamily="34" charset="-120"/>
+              </a:rPr>
+              <a:t>Differentiation</a:t>
+            </a:r>
+            <a:endParaRPr lang="en-US" sz="1800" dirty="0"/>
+          </a:p>
+        </p:txBody>
+      </p:sp>
+      <p:sp>
+        <p:nvSpPr>
+          <p:cNvPr id="4" name="Text 2"/>
+          <p:cNvSpPr/>
+          <p:nvPr/>
+        </p:nvSpPr>
+        <p:spPr>
+          <a:xfrm>
+            <a:off x="634901" y="883593"/>
+            <a:ext cx="8102798" cy="525661"/>
+          </a:xfrm>
+          <a:prstGeom prst="rect">
+            <a:avLst/>
+          </a:prstGeom>
+          <a:noFill/>
+          <a:ln/>
+        </p:spPr>
+        <p:txBody>
+          <a:bodyPr wrap="square" lIns="0" tIns="0" rIns="0" bIns="0" rtlCol="0" anchor="t"/>
+          <a:lstStyle/>
+          <a:p>
+            <a:pPr algn="l" marL="342900" indent="-342900">
+              <a:lnSpc>
+                <a:spcPts val="1620"/>
+              </a:lnSpc>
+              <a:spcAft>
+                <a:spcPts val="300"/>
+              </a:spcAft>
+              <a:buSzPct val="100000"/>
+              <a:buChar char="•"/>
+            </a:pPr>
+            <a:r>
+              <a:rPr lang="en-US" sz="1200" b="1" dirty="0">
+                <a:solidFill>
+                  <a:srgbClr val="2C2C2C"/>
+                </a:solidFill>
+                <a:latin typeface="Verdana" pitchFamily="34" charset="0"/>
+                <a:ea typeface="Verdana" pitchFamily="34" charset="-122"/>
+                <a:cs typeface="Verdana" pitchFamily="34" charset="-120"/>
+              </a:rPr>
+              <a:t>Tier up:</a:t>
+            </a:r>
+            <a:pPr algn="l" indent="0" marL="0">
+              <a:lnSpc>
+                <a:spcPts val="1620"/>
+              </a:lnSpc>
+              <a:spcAft>
+                <a:spcPts val="300"/>
+              </a:spcAft>
+              <a:buNone/>
+            </a:pPr>
+            <a:r>
+              <a:rPr lang="en-US" sz="1200" dirty="0">
+                <a:solidFill>
+                  <a:srgbClr val="2C2C2C"/>
+                </a:solidFill>
+                <a:latin typeface="Verdana" pitchFamily="34" charset="0"/>
+                <a:ea typeface="Verdana" pitchFamily="34" charset="-122"/>
+                <a:cs typeface="Verdana" pitchFamily="34" charset="-120"/>
+              </a:rPr>
+              <a:t> Make up a story about the three friends having a small argument and making up.</a:t>
+            </a:r>
+            <a:endParaRPr lang="en-US" sz="1200" dirty="0"/>
+          </a:p>
+          <a:p>
+            <a:pPr algn="l" marL="342900" indent="-342900">
+              <a:lnSpc>
+                <a:spcPts val="1620"/>
+              </a:lnSpc>
+              <a:spcAft>
+                <a:spcPts val="300"/>
+              </a:spcAft>
+              <a:buSzPct val="100000"/>
+              <a:buChar char="•"/>
+            </a:pPr>
+            <a:r>
+              <a:rPr lang="en-US" sz="1200" b="1" dirty="0">
+                <a:solidFill>
+                  <a:srgbClr val="2C2C2C"/>
+                </a:solidFill>
+                <a:latin typeface="Verdana" pitchFamily="34" charset="0"/>
+                <a:ea typeface="Verdana" pitchFamily="34" charset="-122"/>
+                <a:cs typeface="Verdana" pitchFamily="34" charset="-120"/>
+              </a:rPr>
+              <a:t>Tier down:</a:t>
+            </a:r>
+            <a:pPr algn="l" indent="0" marL="0">
+              <a:lnSpc>
+                <a:spcPts val="1620"/>
+              </a:lnSpc>
+              <a:spcAft>
+                <a:spcPts val="300"/>
+              </a:spcAft>
+              <a:buNone/>
+            </a:pPr>
+            <a:r>
+              <a:rPr lang="en-US" sz="1200" dirty="0">
+                <a:solidFill>
+                  <a:srgbClr val="2C2C2C"/>
+                </a:solidFill>
+                <a:latin typeface="Verdana" pitchFamily="34" charset="0"/>
+                <a:ea typeface="Verdana" pitchFamily="34" charset="-122"/>
+                <a:cs typeface="Verdana" pitchFamily="34" charset="-120"/>
+              </a:rPr>
+              <a:t> Draw just one friend.</a:t>
+            </a:r>
+            <a:endParaRPr lang="en-US" sz="1200" dirty="0"/>
+          </a:p>
+        </p:txBody>
+      </p:sp>
+      <p:sp>
+        <p:nvSpPr>
+          <p:cNvPr id="5" name="Text 3"/>
+          <p:cNvSpPr/>
+          <p:nvPr/>
+        </p:nvSpPr>
+        <p:spPr>
+          <a:xfrm>
+            <a:off x="406301" y="4434929"/>
+            <a:ext cx="8498026" cy="213271"/>
+          </a:xfrm>
+          <a:prstGeom prst="rect">
+            <a:avLst/>
+          </a:prstGeom>
+          <a:noFill/>
+          <a:ln/>
+        </p:spPr>
+        <p:txBody>
+          <a:bodyPr wrap="square" lIns="0" tIns="0" rIns="0" bIns="0" rtlCol="0" anchor="t"/>
+          <a:lstStyle/>
+          <a:p>
+            <a:pPr algn="l" indent="0" marL="0">
+              <a:lnSpc>
+                <a:spcPts val="1680"/>
+              </a:lnSpc>
+              <a:spcBef>
+                <a:spcPts val="300"/>
+              </a:spcBef>
+              <a:spcAft>
+                <a:spcPts val="300"/>
+              </a:spcAft>
+              <a:buNone/>
+            </a:pPr>
+            <a:r>
+              <a:rPr lang="en-US" sz="1200" dirty="0">
+                <a:solidFill>
+                  <a:srgbClr val="2C2C2C"/>
+                </a:solidFill>
+                <a:latin typeface="Verdana" pitchFamily="34" charset="0"/>
+                <a:ea typeface="Verdana" pitchFamily="34" charset="-122"/>
+                <a:cs typeface="Verdana" pitchFamily="34" charset="-120"/>
+              </a:rPr>
+              <a:t>Primary ·  · IKS Curriculum</a:t>
+            </a:r>
+            <a:endParaRPr lang="en-US" sz="1200" dirty="0"/>
+          </a:p>
+        </p:txBody>
+      </p:sp>
+    </p:spTree>
+  </p:cSld>
+  <p:clrMapOvr>
+    <a:masterClrMapping/>
+  </p:clrMapOvr>
+</p:sld>
+</file>
+
+<file path=ppt/slides/slide14.xml><?xml version="1.0" encoding="utf-8"?>
+<p:sld xmlns:a="http://schemas.openxmlformats.org/drawingml/2006/main" xmlns:r="http://schemas.openxmlformats.org/officeDocument/2006/relationships" xmlns:p="http://schemas.openxmlformats.org/presentationml/2006/main">
+  <p:cSld name="Slide 14">
+    <p:bg>
+      <p:bgPr>
+        <a:solidFill>
+          <a:srgbClr val="FAF7F2"/>
+        </a:solidFill>
+      </p:bgPr>
+    </p:bg>
+    <p:spTree>
+      <p:nvGrpSpPr>
+        <p:cNvPr id="1" name=""/>
+        <p:cNvGrpSpPr/>
+        <p:nvPr/>
+      </p:nvGrpSpPr>
+      <p:grpSpPr>
+        <a:xfrm>
+          <a:off x="0" y="0"/>
+          <a:ext cx="0" cy="0"/>
+          <a:chOff x="0" y="0"/>
+          <a:chExt cx="0" cy="0"/>
+        </a:xfrm>
+      </p:grpSpPr>
+      <p:sp>
+        <p:nvSpPr>
+          <p:cNvPr id="2" name="Text 0"/>
+          <p:cNvSpPr/>
+          <p:nvPr/>
+        </p:nvSpPr>
+        <p:spPr>
+          <a:xfrm>
+            <a:off x="0" y="0"/>
+            <a:ext cx="9144000" cy="101501"/>
+          </a:xfrm>
+          <a:prstGeom prst="rect">
+            <a:avLst/>
+          </a:prstGeom>
+          <a:solidFill>
+            <a:srgbClr val="87A96B"/>
+          </a:solidFill>
+          <a:ln/>
+        </p:spPr>
+        <p:txBody>
+          <a:bodyPr wrap="square" rtlCol="0" anchor="ctr"/>
+          <a:lstStyle/>
+          <a:p>
+            <a:pPr indent="0" marL="0">
+              <a:buNone/>
+            </a:pPr>
+            <a:endParaRPr lang="en-US" dirty="0"/>
+          </a:p>
+        </p:txBody>
+      </p:sp>
+      <p:sp>
+        <p:nvSpPr>
+          <p:cNvPr id="3" name="Text 1"/>
+          <p:cNvSpPr/>
+          <p:nvPr/>
+        </p:nvSpPr>
+        <p:spPr>
+          <a:xfrm>
+            <a:off x="406301" y="457051"/>
+            <a:ext cx="8498026" cy="274290"/>
+          </a:xfrm>
+          <a:prstGeom prst="rect">
+            <a:avLst/>
+          </a:prstGeom>
+          <a:noFill/>
+          <a:ln/>
+        </p:spPr>
+        <p:txBody>
+          <a:bodyPr wrap="square" lIns="0" tIns="0" rIns="0" bIns="0" rtlCol="0" anchor="t"/>
+          <a:lstStyle/>
+          <a:p>
+            <a:pPr algn="l" indent="0" marL="0">
+              <a:lnSpc>
+                <a:spcPts val="2160"/>
+              </a:lnSpc>
+              <a:spcBef>
+                <a:spcPts val="600"/>
+              </a:spcBef>
+              <a:spcAft>
+                <a:spcPts val="800"/>
+              </a:spcAft>
+              <a:buNone/>
+            </a:pPr>
+            <a:r>
+              <a:rPr lang="en-US" sz="1800" b="1" dirty="0">
+                <a:solidFill>
+                  <a:srgbClr val="E07A5F"/>
+                </a:solidFill>
+                <a:latin typeface="Georgia" pitchFamily="34" charset="0"/>
+                <a:ea typeface="Georgia" pitchFamily="34" charset="-122"/>
+                <a:cs typeface="Georgia" pitchFamily="34" charset="-120"/>
+              </a:rPr>
+              <a:t>Teacher notes</a:t>
+            </a:r>
+            <a:endParaRPr lang="en-US" sz="1800" dirty="0"/>
+          </a:p>
+        </p:txBody>
+      </p:sp>
+      <p:sp>
+        <p:nvSpPr>
+          <p:cNvPr id="4" name="Text 2"/>
+          <p:cNvSpPr/>
+          <p:nvPr/>
+        </p:nvSpPr>
+        <p:spPr>
+          <a:xfrm>
+            <a:off x="634901" y="883593"/>
+            <a:ext cx="8102798" cy="525661"/>
+          </a:xfrm>
+          <a:prstGeom prst="rect">
+            <a:avLst/>
+          </a:prstGeom>
+          <a:noFill/>
+          <a:ln/>
+        </p:spPr>
+        <p:txBody>
+          <a:bodyPr wrap="square" lIns="0" tIns="0" rIns="0" bIns="0" rtlCol="0" anchor="t"/>
+          <a:lstStyle/>
+          <a:p>
+            <a:pPr algn="l" marL="342900" indent="-342900">
+              <a:lnSpc>
+                <a:spcPts val="1620"/>
+              </a:lnSpc>
+              <a:spcAft>
+                <a:spcPts val="300"/>
+              </a:spcAft>
+              <a:buSzPct val="100000"/>
+              <a:buChar char="•"/>
+            </a:pPr>
+            <a:r>
+              <a:rPr lang="en-US" sz="1200" dirty="0">
+                <a:solidFill>
+                  <a:srgbClr val="2C2C2C"/>
+                </a:solidFill>
+                <a:latin typeface="Verdana" pitchFamily="34" charset="0"/>
+                <a:ea typeface="Verdana" pitchFamily="34" charset="-122"/>
+                <a:cs typeface="Verdana" pitchFamily="34" charset="-120"/>
+              </a:rPr>
+              <a:t>Module 3 (Ayurveda + Good Health) is the FULL Ayurveda module. Today is a taste.</a:t>
+            </a:r>
+            <a:endParaRPr lang="en-US" sz="1200" dirty="0"/>
+          </a:p>
+          <a:p>
+            <a:pPr algn="l" marL="342900" indent="-342900">
+              <a:lnSpc>
+                <a:spcPts val="1620"/>
+              </a:lnSpc>
+              <a:spcAft>
+                <a:spcPts val="300"/>
+              </a:spcAft>
+              <a:buSzPct val="100000"/>
+              <a:buChar char="•"/>
+            </a:pPr>
+            <a:r>
+              <a:rPr lang="en-US" sz="1200" dirty="0">
+                <a:solidFill>
+                  <a:srgbClr val="2C2C2C"/>
+                </a:solidFill>
+                <a:latin typeface="Verdana" pitchFamily="34" charset="0"/>
+                <a:ea typeface="Verdana" pitchFamily="34" charset="-122"/>
+                <a:cs typeface="Verdana" pitchFamily="34" charset="-120"/>
+              </a:rPr>
+              <a:t>Don't push children to identify their "type" — at this age it's just an introduction.</a:t>
             </a:r>
             <a:endParaRPr lang="en-US" sz="1200" dirty="0"/>
           </a:p>
@@ -2679,7 +3508,7 @@
                 <a:ea typeface="Georgia" pitchFamily="34" charset="-122"/>
                 <a:cs typeface="Georgia" pitchFamily="34" charset="-120"/>
               </a:rPr>
-              <a:t>Materials</a:t>
+              <a:t>Goal</a:t>
             </a:r>
             <a:endParaRPr lang="en-US" sz="1800" dirty="0"/>
           </a:p>
@@ -2727,7 +3556,7 @@
                 <a:ea typeface="Verdana" pitchFamily="34" charset="-122"/>
                 <a:cs typeface="Verdana" pitchFamily="34" charset="-120"/>
               </a:rPr>
-              <a:t>– 3 picture cards: wind blowing leaves (Vāta), fire/sun (Pitta), water/clouds (Kapha) – Drawing paper</a:t>
+              <a:t>Children meet the three doshas (vāta, pitta, kapha) as "three friends in your body."</a:t>
             </a:r>
             <a:endParaRPr lang="en-US" sz="1200" dirty="0"/>
           </a:p>
@@ -2885,7 +3714,7 @@
                 <a:ea typeface="Georgia" pitchFamily="34" charset="-122"/>
                 <a:cs typeface="Georgia" pitchFamily="34" charset="-120"/>
               </a:rPr>
-              <a:t>Flow</a:t>
+              <a:t>Materials</a:t>
             </a:r>
             <a:endParaRPr lang="en-US" sz="1800" dirty="0"/>
           </a:p>
@@ -2894,6 +3723,76 @@
       <p:sp>
         <p:nvSpPr>
           <p:cNvPr id="4" name="Text 2"/>
+          <p:cNvSpPr/>
+          <p:nvPr/>
+        </p:nvSpPr>
+        <p:spPr>
+          <a:xfrm>
+            <a:off x="634901" y="883593"/>
+            <a:ext cx="8102798" cy="525661"/>
+          </a:xfrm>
+          <a:prstGeom prst="rect">
+            <a:avLst/>
+          </a:prstGeom>
+          <a:noFill/>
+          <a:ln/>
+        </p:spPr>
+        <p:txBody>
+          <a:bodyPr wrap="square" lIns="0" tIns="0" rIns="0" bIns="0" rtlCol="0" anchor="t"/>
+          <a:lstStyle/>
+          <a:p>
+            <a:pPr algn="l" marL="342900" indent="-342900">
+              <a:lnSpc>
+                <a:spcPts val="1620"/>
+              </a:lnSpc>
+              <a:spcAft>
+                <a:spcPts val="300"/>
+              </a:spcAft>
+              <a:buSzPct val="100000"/>
+              <a:buChar char="•"/>
+            </a:pPr>
+            <a:r>
+              <a:rPr lang="en-US" sz="1200" dirty="0">
+                <a:solidFill>
+                  <a:srgbClr val="2C2C2C"/>
+                </a:solidFill>
+                <a:latin typeface="Verdana" pitchFamily="34" charset="0"/>
+                <a:ea typeface="Verdana" pitchFamily="34" charset="-122"/>
+                <a:cs typeface="Verdana" pitchFamily="34" charset="-120"/>
+              </a:rPr>
+              <a:t>3 picture cards: wind blowing leaves (Vāta), fire/sun (Pitta), water/clouds (Kapha)</a:t>
+            </a:r>
+            <a:endParaRPr lang="en-US" sz="1200" dirty="0"/>
+          </a:p>
+          <a:p>
+            <a:pPr algn="l" marL="342900" indent="-342900">
+              <a:lnSpc>
+                <a:spcPts val="1620"/>
+              </a:lnSpc>
+              <a:spcAft>
+                <a:spcPts val="300"/>
+              </a:spcAft>
+              <a:buSzPct val="100000"/>
+              <a:buChar char="•"/>
+            </a:pPr>
+            <a:r>
+              <a:rPr lang="en-US" sz="1200" dirty="0">
+                <a:solidFill>
+                  <a:srgbClr val="2C2C2C"/>
+                </a:solidFill>
+                <a:latin typeface="Verdana" pitchFamily="34" charset="0"/>
+                <a:ea typeface="Verdana" pitchFamily="34" charset="-122"/>
+                <a:cs typeface="Verdana" pitchFamily="34" charset="-120"/>
+              </a:rPr>
+              <a:t>Drawing paper</a:t>
+            </a:r>
+            <a:endParaRPr lang="en-US" sz="1200" dirty="0"/>
+          </a:p>
+        </p:txBody>
+      </p:sp>
+      <p:sp>
+        <p:nvSpPr>
+          <p:cNvPr id="5" name="Text 3"/>
           <p:cNvSpPr/>
           <p:nvPr/>
         </p:nvSpPr>
@@ -3043,7 +3942,7 @@
                 <a:ea typeface="Georgia" pitchFamily="34" charset="-122"/>
                 <a:cs typeface="Georgia" pitchFamily="34" charset="-120"/>
               </a:rPr>
-              <a:t>Settle + chant (3 min)</a:t>
+              <a:t>Flow</a:t>
             </a:r>
             <a:endParaRPr lang="en-US" sz="1800" dirty="0"/>
           </a:p>
@@ -3201,7 +4100,7 @@
                 <a:ea typeface="Georgia" pitchFamily="34" charset="-122"/>
                 <a:cs typeface="Georgia" pitchFamily="34" charset="-120"/>
               </a:rPr>
-              <a:t>Story (10 min)</a:t>
+              <a:t>Settle + chant (3 min)</a:t>
             </a:r>
             <a:endParaRPr lang="en-US" sz="1800" dirty="0"/>
           </a:p>
@@ -3210,411 +4109,6 @@
       <p:sp>
         <p:nvSpPr>
           <p:cNvPr id="4" name="Text 2"/>
-          <p:cNvSpPr/>
-          <p:nvPr/>
-        </p:nvSpPr>
-        <p:spPr>
-          <a:xfrm>
-            <a:off x="406301" y="870942"/>
-            <a:ext cx="8498026" cy="213271"/>
-          </a:xfrm>
-          <a:prstGeom prst="rect">
-            <a:avLst/>
-          </a:prstGeom>
-          <a:noFill/>
-          <a:ln/>
-        </p:spPr>
-        <p:txBody>
-          <a:bodyPr wrap="square" lIns="0" tIns="0" rIns="0" bIns="0" rtlCol="0" anchor="t"/>
-          <a:lstStyle/>
-          <a:p>
-            <a:pPr algn="l" indent="0" marL="0">
-              <a:lnSpc>
-                <a:spcPts val="1680"/>
-              </a:lnSpc>
-              <a:spcBef>
-                <a:spcPts val="300"/>
-              </a:spcBef>
-              <a:spcAft>
-                <a:spcPts val="300"/>
-              </a:spcAft>
-              <a:buNone/>
-            </a:pPr>
-            <a:r>
-              <a:rPr lang="en-US" sz="1200" i="1" dirty="0">
-                <a:solidFill>
-                  <a:srgbClr val="2C2C2C"/>
-                </a:solidFill>
-                <a:latin typeface="Verdana" pitchFamily="34" charset="0"/>
-                <a:ea typeface="Verdana" pitchFamily="34" charset="-122"/>
-                <a:cs typeface="Verdana" pitchFamily="34" charset="-120"/>
-              </a:rPr>
-              <a:t>"Ayurveda is the OLD Indian way of staying healthy. It started about 2000 years ago."</a:t>
-            </a:r>
-            <a:endParaRPr lang="en-US" sz="1200" dirty="0"/>
-          </a:p>
-        </p:txBody>
-      </p:sp>
-      <p:sp>
-        <p:nvSpPr>
-          <p:cNvPr id="5" name="Text 3"/>
-          <p:cNvSpPr/>
-          <p:nvPr/>
-        </p:nvSpPr>
-        <p:spPr>
-          <a:xfrm>
-            <a:off x="406301" y="1160413"/>
-            <a:ext cx="8498026" cy="426541"/>
-          </a:xfrm>
-          <a:prstGeom prst="rect">
-            <a:avLst/>
-          </a:prstGeom>
-          <a:noFill/>
-          <a:ln/>
-        </p:spPr>
-        <p:txBody>
-          <a:bodyPr wrap="square" lIns="0" tIns="0" rIns="0" bIns="0" rtlCol="0" anchor="t"/>
-          <a:lstStyle/>
-          <a:p>
-            <a:pPr algn="l" indent="0" marL="0">
-              <a:lnSpc>
-                <a:spcPts val="1680"/>
-              </a:lnSpc>
-              <a:spcBef>
-                <a:spcPts val="300"/>
-              </a:spcBef>
-              <a:spcAft>
-                <a:spcPts val="300"/>
-              </a:spcAft>
-              <a:buNone/>
-            </a:pPr>
-            <a:r>
-              <a:rPr lang="en-US" sz="1200" i="1" dirty="0">
-                <a:solidFill>
-                  <a:srgbClr val="2C2C2C"/>
-                </a:solidFill>
-                <a:latin typeface="Verdana" pitchFamily="34" charset="0"/>
-                <a:ea typeface="Verdana" pitchFamily="34" charset="-122"/>
-                <a:cs typeface="Verdana" pitchFamily="34" charset="-120"/>
-              </a:rPr>
-              <a:t>"Ayurveda says everyone's body has THREE FRIENDS inside it. We all have all three — but everyone has a special favourite."</a:t>
-            </a:r>
-            <a:endParaRPr lang="en-US" sz="1200" dirty="0"/>
-          </a:p>
-        </p:txBody>
-      </p:sp>
-      <p:sp>
-        <p:nvSpPr>
-          <p:cNvPr id="6" name="Text 4"/>
-          <p:cNvSpPr/>
-          <p:nvPr/>
-        </p:nvSpPr>
-        <p:spPr>
-          <a:xfrm>
-            <a:off x="406301" y="1663154"/>
-            <a:ext cx="8498026" cy="213271"/>
-          </a:xfrm>
-          <a:prstGeom prst="rect">
-            <a:avLst/>
-          </a:prstGeom>
-          <a:noFill/>
-          <a:ln/>
-        </p:spPr>
-        <p:txBody>
-          <a:bodyPr wrap="square" lIns="0" tIns="0" rIns="0" bIns="0" rtlCol="0" anchor="t"/>
-          <a:lstStyle/>
-          <a:p>
-            <a:pPr algn="l" indent="0" marL="0">
-              <a:lnSpc>
-                <a:spcPts val="1680"/>
-              </a:lnSpc>
-              <a:spcBef>
-                <a:spcPts val="300"/>
-              </a:spcBef>
-              <a:spcAft>
-                <a:spcPts val="300"/>
-              </a:spcAft>
-              <a:buNone/>
-            </a:pPr>
-            <a:r>
-              <a:rPr lang="en-US" sz="1200" dirty="0">
-                <a:solidFill>
-                  <a:srgbClr val="2C2C2C"/>
-                </a:solidFill>
-                <a:latin typeface="Verdana" pitchFamily="34" charset="0"/>
-                <a:ea typeface="Verdana" pitchFamily="34" charset="-122"/>
-                <a:cs typeface="Verdana" pitchFamily="34" charset="-120"/>
-              </a:rPr>
-              <a:t>Show the cards:</a:t>
-            </a:r>
-            <a:endParaRPr lang="en-US" sz="1200" dirty="0"/>
-          </a:p>
-        </p:txBody>
-      </p:sp>
-      <p:sp>
-        <p:nvSpPr>
-          <p:cNvPr id="7" name="Text 5"/>
-          <p:cNvSpPr/>
-          <p:nvPr/>
-        </p:nvSpPr>
-        <p:spPr>
-          <a:xfrm>
-            <a:off x="406301" y="1952625"/>
-            <a:ext cx="8498026" cy="426541"/>
-          </a:xfrm>
-          <a:prstGeom prst="rect">
-            <a:avLst/>
-          </a:prstGeom>
-          <a:noFill/>
-          <a:ln/>
-        </p:spPr>
-        <p:txBody>
-          <a:bodyPr wrap="square" lIns="0" tIns="0" rIns="0" bIns="0" rtlCol="0" anchor="t"/>
-          <a:lstStyle/>
-          <a:p>
-            <a:pPr algn="l" indent="0" marL="0">
-              <a:lnSpc>
-                <a:spcPts val="1680"/>
-              </a:lnSpc>
-              <a:spcBef>
-                <a:spcPts val="300"/>
-              </a:spcBef>
-              <a:spcAft>
-                <a:spcPts val="300"/>
-              </a:spcAft>
-              <a:buNone/>
-            </a:pPr>
-            <a:r>
-              <a:rPr lang="en-US" sz="1200" b="1" dirty="0">
-                <a:solidFill>
-                  <a:srgbClr val="2C2C2C"/>
-                </a:solidFill>
-                <a:latin typeface="Verdana" pitchFamily="34" charset="0"/>
-                <a:ea typeface="Verdana" pitchFamily="34" charset="-122"/>
-                <a:cs typeface="Verdana" pitchFamily="34" charset="-120"/>
-              </a:rPr>
-              <a:t>Vāta (wind friend):</a:t>
-            </a:r>
-            <a:pPr algn="l" indent="0" marL="0">
-              <a:lnSpc>
-                <a:spcPts val="1680"/>
-              </a:lnSpc>
-              <a:spcBef>
-                <a:spcPts val="300"/>
-              </a:spcBef>
-              <a:spcAft>
-                <a:spcPts val="300"/>
-              </a:spcAft>
-              <a:buNone/>
-            </a:pPr>
-            <a:r>
-              <a:rPr lang="en-US" sz="1200" dirty="0">
-                <a:solidFill>
-                  <a:srgbClr val="2C2C2C"/>
-                </a:solidFill>
-                <a:latin typeface="Verdana" pitchFamily="34" charset="0"/>
-                <a:ea typeface="Verdana" pitchFamily="34" charset="-122"/>
-                <a:cs typeface="Verdana" pitchFamily="34" charset="-120"/>
-              </a:rPr>
-              <a:t> – Moves things around inside you. – People with lots of Vāta are quick, talkative, sometimes fidgety.</a:t>
-            </a:r>
-            <a:endParaRPr lang="en-US" sz="1200" dirty="0"/>
-          </a:p>
-        </p:txBody>
-      </p:sp>
-      <p:sp>
-        <p:nvSpPr>
-          <p:cNvPr id="8" name="Text 6"/>
-          <p:cNvSpPr/>
-          <p:nvPr/>
-        </p:nvSpPr>
-        <p:spPr>
-          <a:xfrm>
-            <a:off x="406301" y="2455366"/>
-            <a:ext cx="8498026" cy="426541"/>
-          </a:xfrm>
-          <a:prstGeom prst="rect">
-            <a:avLst/>
-          </a:prstGeom>
-          <a:noFill/>
-          <a:ln/>
-        </p:spPr>
-        <p:txBody>
-          <a:bodyPr wrap="square" lIns="0" tIns="0" rIns="0" bIns="0" rtlCol="0" anchor="t"/>
-          <a:lstStyle/>
-          <a:p>
-            <a:pPr algn="l" indent="0" marL="0">
-              <a:lnSpc>
-                <a:spcPts val="1680"/>
-              </a:lnSpc>
-              <a:spcBef>
-                <a:spcPts val="300"/>
-              </a:spcBef>
-              <a:spcAft>
-                <a:spcPts val="300"/>
-              </a:spcAft>
-              <a:buNone/>
-            </a:pPr>
-            <a:r>
-              <a:rPr lang="en-US" sz="1200" b="1" dirty="0">
-                <a:solidFill>
-                  <a:srgbClr val="2C2C2C"/>
-                </a:solidFill>
-                <a:latin typeface="Verdana" pitchFamily="34" charset="0"/>
-                <a:ea typeface="Verdana" pitchFamily="34" charset="-122"/>
-                <a:cs typeface="Verdana" pitchFamily="34" charset="-120"/>
-              </a:rPr>
-              <a:t>Pitta (fire friend):</a:t>
-            </a:r>
-            <a:pPr algn="l" indent="0" marL="0">
-              <a:lnSpc>
-                <a:spcPts val="1680"/>
-              </a:lnSpc>
-              <a:spcBef>
-                <a:spcPts val="300"/>
-              </a:spcBef>
-              <a:spcAft>
-                <a:spcPts val="300"/>
-              </a:spcAft>
-              <a:buNone/>
-            </a:pPr>
-            <a:r>
-              <a:rPr lang="en-US" sz="1200" dirty="0">
-                <a:solidFill>
-                  <a:srgbClr val="2C2C2C"/>
-                </a:solidFill>
-                <a:latin typeface="Verdana" pitchFamily="34" charset="0"/>
-                <a:ea typeface="Verdana" pitchFamily="34" charset="-122"/>
-                <a:cs typeface="Verdana" pitchFamily="34" charset="-120"/>
-              </a:rPr>
-              <a:t> – Makes your food into energy. – People with lots of Pitta are sharp, focused, can be a bit fiery.</a:t>
-            </a:r>
-            <a:endParaRPr lang="en-US" sz="1200" dirty="0"/>
-          </a:p>
-        </p:txBody>
-      </p:sp>
-      <p:sp>
-        <p:nvSpPr>
-          <p:cNvPr id="9" name="Text 7"/>
-          <p:cNvSpPr/>
-          <p:nvPr/>
-        </p:nvSpPr>
-        <p:spPr>
-          <a:xfrm>
-            <a:off x="406301" y="2958108"/>
-            <a:ext cx="8498026" cy="426541"/>
-          </a:xfrm>
-          <a:prstGeom prst="rect">
-            <a:avLst/>
-          </a:prstGeom>
-          <a:noFill/>
-          <a:ln/>
-        </p:spPr>
-        <p:txBody>
-          <a:bodyPr wrap="square" lIns="0" tIns="0" rIns="0" bIns="0" rtlCol="0" anchor="t"/>
-          <a:lstStyle/>
-          <a:p>
-            <a:pPr algn="l" indent="0" marL="0">
-              <a:lnSpc>
-                <a:spcPts val="1680"/>
-              </a:lnSpc>
-              <a:spcBef>
-                <a:spcPts val="300"/>
-              </a:spcBef>
-              <a:spcAft>
-                <a:spcPts val="300"/>
-              </a:spcAft>
-              <a:buNone/>
-            </a:pPr>
-            <a:r>
-              <a:rPr lang="en-US" sz="1200" b="1" dirty="0">
-                <a:solidFill>
-                  <a:srgbClr val="2C2C2C"/>
-                </a:solidFill>
-                <a:latin typeface="Verdana" pitchFamily="34" charset="0"/>
-                <a:ea typeface="Verdana" pitchFamily="34" charset="-122"/>
-                <a:cs typeface="Verdana" pitchFamily="34" charset="-120"/>
-              </a:rPr>
-              <a:t>Kapha (water/earth friend):</a:t>
-            </a:r>
-            <a:pPr algn="l" indent="0" marL="0">
-              <a:lnSpc>
-                <a:spcPts val="1680"/>
-              </a:lnSpc>
-              <a:spcBef>
-                <a:spcPts val="300"/>
-              </a:spcBef>
-              <a:spcAft>
-                <a:spcPts val="300"/>
-              </a:spcAft>
-              <a:buNone/>
-            </a:pPr>
-            <a:r>
-              <a:rPr lang="en-US" sz="1200" dirty="0">
-                <a:solidFill>
-                  <a:srgbClr val="2C2C2C"/>
-                </a:solidFill>
-                <a:latin typeface="Verdana" pitchFamily="34" charset="0"/>
-                <a:ea typeface="Verdana" pitchFamily="34" charset="-122"/>
-                <a:cs typeface="Verdana" pitchFamily="34" charset="-120"/>
-              </a:rPr>
-              <a:t> – Keeps you strong and steady. – People with lots of Kapha are calm, patient, sometimes slow.</a:t>
-            </a:r>
-            <a:endParaRPr lang="en-US" sz="1200" dirty="0"/>
-          </a:p>
-        </p:txBody>
-      </p:sp>
-      <p:sp>
-        <p:nvSpPr>
-          <p:cNvPr id="10" name="Text 8"/>
-          <p:cNvSpPr/>
-          <p:nvPr/>
-        </p:nvSpPr>
-        <p:spPr>
-          <a:xfrm>
-            <a:off x="406301" y="3460849"/>
-            <a:ext cx="8498026" cy="213271"/>
-          </a:xfrm>
-          <a:prstGeom prst="rect">
-            <a:avLst/>
-          </a:prstGeom>
-          <a:noFill/>
-          <a:ln/>
-        </p:spPr>
-        <p:txBody>
-          <a:bodyPr wrap="square" lIns="0" tIns="0" rIns="0" bIns="0" rtlCol="0" anchor="t"/>
-          <a:lstStyle/>
-          <a:p>
-            <a:pPr algn="l" indent="0" marL="0">
-              <a:lnSpc>
-                <a:spcPts val="1680"/>
-              </a:lnSpc>
-              <a:spcBef>
-                <a:spcPts val="300"/>
-              </a:spcBef>
-              <a:spcAft>
-                <a:spcPts val="300"/>
-              </a:spcAft>
-              <a:buNone/>
-            </a:pPr>
-            <a:r>
-              <a:rPr lang="en-US" sz="1200" i="1" dirty="0">
-                <a:solidFill>
-                  <a:srgbClr val="2C2C2C"/>
-                </a:solidFill>
-                <a:latin typeface="Verdana" pitchFamily="34" charset="0"/>
-                <a:ea typeface="Verdana" pitchFamily="34" charset="-122"/>
-                <a:cs typeface="Verdana" pitchFamily="34" charset="-120"/>
-              </a:rPr>
-              <a:t>"None of these is 'good' or 'bad' — they're all friends. The trick is keeping them in balance."</a:t>
-            </a:r>
-            <a:endParaRPr lang="en-US" sz="1200" dirty="0"/>
-          </a:p>
-        </p:txBody>
-      </p:sp>
-      <p:sp>
-        <p:nvSpPr>
-          <p:cNvPr id="11" name="Text 9"/>
           <p:cNvSpPr/>
           <p:nvPr/>
         </p:nvSpPr>
@@ -3764,7 +4258,7 @@
                 <a:ea typeface="Georgia" pitchFamily="34" charset="-122"/>
                 <a:cs typeface="Georgia" pitchFamily="34" charset="-120"/>
               </a:rPr>
-              <a:t>Drawing (12 min)</a:t>
+              <a:t>Story (10 min)</a:t>
             </a:r>
             <a:endParaRPr lang="en-US" sz="1800" dirty="0"/>
           </a:p>
@@ -3804,7 +4298,7 @@
               <a:buNone/>
             </a:pPr>
             <a:r>
-              <a:rPr lang="en-US" sz="1200" dirty="0">
+              <a:rPr lang="en-US" sz="1200" i="1" dirty="0">
                 <a:solidFill>
                   <a:srgbClr val="2C2C2C"/>
                 </a:solidFill>
@@ -3812,7 +4306,7 @@
                 <a:ea typeface="Verdana" pitchFamily="34" charset="-122"/>
                 <a:cs typeface="Verdana" pitchFamily="34" charset="-120"/>
               </a:rPr>
-              <a:t>Each child draws their three friends. They can give them faces, names, anything!</a:t>
+              <a:t>"Ayurveda is the OLD Indian way of staying healthy. It started about 2000 years ago."</a:t>
             </a:r>
             <a:endParaRPr lang="en-US" sz="1200" dirty="0"/>
           </a:p>
@@ -3821,6 +4315,102 @@
       <p:sp>
         <p:nvSpPr>
           <p:cNvPr id="5" name="Text 3"/>
+          <p:cNvSpPr/>
+          <p:nvPr/>
+        </p:nvSpPr>
+        <p:spPr>
+          <a:xfrm>
+            <a:off x="406301" y="1160413"/>
+            <a:ext cx="8498026" cy="426541"/>
+          </a:xfrm>
+          <a:prstGeom prst="rect">
+            <a:avLst/>
+          </a:prstGeom>
+          <a:noFill/>
+          <a:ln/>
+        </p:spPr>
+        <p:txBody>
+          <a:bodyPr wrap="square" lIns="0" tIns="0" rIns="0" bIns="0" rtlCol="0" anchor="t"/>
+          <a:lstStyle/>
+          <a:p>
+            <a:pPr algn="l" indent="0" marL="0">
+              <a:lnSpc>
+                <a:spcPts val="1680"/>
+              </a:lnSpc>
+              <a:spcBef>
+                <a:spcPts val="300"/>
+              </a:spcBef>
+              <a:spcAft>
+                <a:spcPts val="300"/>
+              </a:spcAft>
+              <a:buNone/>
+            </a:pPr>
+            <a:r>
+              <a:rPr lang="en-US" sz="1200" i="1" dirty="0">
+                <a:solidFill>
+                  <a:srgbClr val="2C2C2C"/>
+                </a:solidFill>
+                <a:latin typeface="Verdana" pitchFamily="34" charset="0"/>
+                <a:ea typeface="Verdana" pitchFamily="34" charset="-122"/>
+                <a:cs typeface="Verdana" pitchFamily="34" charset="-120"/>
+              </a:rPr>
+              <a:t>"Ayurveda says everyone's body has THREE FRIENDS inside it. We all have all three — but everyone has a special favourite."</a:t>
+            </a:r>
+            <a:endParaRPr lang="en-US" sz="1200" dirty="0"/>
+          </a:p>
+        </p:txBody>
+      </p:sp>
+      <p:sp>
+        <p:nvSpPr>
+          <p:cNvPr id="6" name="Text 4"/>
+          <p:cNvSpPr/>
+          <p:nvPr/>
+        </p:nvSpPr>
+        <p:spPr>
+          <a:xfrm>
+            <a:off x="406301" y="1663154"/>
+            <a:ext cx="8498026" cy="213271"/>
+          </a:xfrm>
+          <a:prstGeom prst="rect">
+            <a:avLst/>
+          </a:prstGeom>
+          <a:noFill/>
+          <a:ln/>
+        </p:spPr>
+        <p:txBody>
+          <a:bodyPr wrap="square" lIns="0" tIns="0" rIns="0" bIns="0" rtlCol="0" anchor="t"/>
+          <a:lstStyle/>
+          <a:p>
+            <a:pPr algn="l" indent="0" marL="0">
+              <a:lnSpc>
+                <a:spcPts val="1680"/>
+              </a:lnSpc>
+              <a:spcBef>
+                <a:spcPts val="300"/>
+              </a:spcBef>
+              <a:spcAft>
+                <a:spcPts val="300"/>
+              </a:spcAft>
+              <a:buNone/>
+            </a:pPr>
+            <a:r>
+              <a:rPr lang="en-US" sz="1200" dirty="0">
+                <a:solidFill>
+                  <a:srgbClr val="2C2C2C"/>
+                </a:solidFill>
+                <a:latin typeface="Verdana" pitchFamily="34" charset="0"/>
+                <a:ea typeface="Verdana" pitchFamily="34" charset="-122"/>
+                <a:cs typeface="Verdana" pitchFamily="34" charset="-120"/>
+              </a:rPr>
+              <a:t>Show the cards:</a:t>
+            </a:r>
+            <a:endParaRPr lang="en-US" sz="1200" dirty="0"/>
+          </a:p>
+        </p:txBody>
+      </p:sp>
+      <p:sp>
+        <p:nvSpPr>
+          <p:cNvPr id="7" name="Text 5"/>
           <p:cNvSpPr/>
           <p:nvPr/>
         </p:nvSpPr>
@@ -3970,7 +4560,7 @@
                 <a:ea typeface="Georgia" pitchFamily="34" charset="-122"/>
                 <a:cs typeface="Georgia" pitchFamily="34" charset="-120"/>
               </a:rPr>
-              <a:t>Show + chant (3 min)</a:t>
+              <a:t>Story (10 min) (cont.)</a:t>
             </a:r>
             <a:endParaRPr lang="en-US" sz="1800" dirty="0"/>
           </a:p>
@@ -4010,7 +4600,7 @@
               <a:buNone/>
             </a:pPr>
             <a:r>
-              <a:rPr lang="en-US" sz="1200" dirty="0">
+              <a:rPr lang="en-US" sz="1200" b="1" dirty="0">
                 <a:solidFill>
                   <a:srgbClr val="2C2C2C"/>
                 </a:solidFill>
@@ -4018,7 +4608,7 @@
                 <a:ea typeface="Verdana" pitchFamily="34" charset="-122"/>
                 <a:cs typeface="Verdana" pitchFamily="34" charset="-120"/>
               </a:rPr>
-              <a:t>– 2 shares. – Chant.</a:t>
+              <a:t>Vāta (wind friend):</a:t>
             </a:r>
             <a:endParaRPr lang="en-US" sz="1200" dirty="0"/>
           </a:p>
@@ -4027,6 +4617,194 @@
       <p:sp>
         <p:nvSpPr>
           <p:cNvPr id="5" name="Text 3"/>
+          <p:cNvSpPr/>
+          <p:nvPr/>
+        </p:nvSpPr>
+        <p:spPr>
+          <a:xfrm>
+            <a:off x="634901" y="1173063"/>
+            <a:ext cx="8102798" cy="525661"/>
+          </a:xfrm>
+          <a:prstGeom prst="rect">
+            <a:avLst/>
+          </a:prstGeom>
+          <a:noFill/>
+          <a:ln/>
+        </p:spPr>
+        <p:txBody>
+          <a:bodyPr wrap="square" lIns="0" tIns="0" rIns="0" bIns="0" rtlCol="0" anchor="t"/>
+          <a:lstStyle/>
+          <a:p>
+            <a:pPr algn="l" marL="342900" indent="-342900">
+              <a:lnSpc>
+                <a:spcPts val="1620"/>
+              </a:lnSpc>
+              <a:spcAft>
+                <a:spcPts val="300"/>
+              </a:spcAft>
+              <a:buSzPct val="100000"/>
+              <a:buChar char="•"/>
+            </a:pPr>
+            <a:r>
+              <a:rPr lang="en-US" sz="1200" dirty="0">
+                <a:solidFill>
+                  <a:srgbClr val="2C2C2C"/>
+                </a:solidFill>
+                <a:latin typeface="Verdana" pitchFamily="34" charset="0"/>
+                <a:ea typeface="Verdana" pitchFamily="34" charset="-122"/>
+                <a:cs typeface="Verdana" pitchFamily="34" charset="-120"/>
+              </a:rPr>
+              <a:t>Moves things around inside you.</a:t>
+            </a:r>
+            <a:endParaRPr lang="en-US" sz="1200" dirty="0"/>
+          </a:p>
+          <a:p>
+            <a:pPr algn="l" marL="342900" indent="-342900">
+              <a:lnSpc>
+                <a:spcPts val="1620"/>
+              </a:lnSpc>
+              <a:spcAft>
+                <a:spcPts val="300"/>
+              </a:spcAft>
+              <a:buSzPct val="100000"/>
+              <a:buChar char="•"/>
+            </a:pPr>
+            <a:r>
+              <a:rPr lang="en-US" sz="1200" dirty="0">
+                <a:solidFill>
+                  <a:srgbClr val="2C2C2C"/>
+                </a:solidFill>
+                <a:latin typeface="Verdana" pitchFamily="34" charset="0"/>
+                <a:ea typeface="Verdana" pitchFamily="34" charset="-122"/>
+                <a:cs typeface="Verdana" pitchFamily="34" charset="-120"/>
+              </a:rPr>
+              <a:t>People with lots of Vāta are quick, talkative, sometimes fidgety.</a:t>
+            </a:r>
+            <a:endParaRPr lang="en-US" sz="1200" dirty="0"/>
+          </a:p>
+        </p:txBody>
+      </p:sp>
+      <p:sp>
+        <p:nvSpPr>
+          <p:cNvPr id="6" name="Text 4"/>
+          <p:cNvSpPr/>
+          <p:nvPr/>
+        </p:nvSpPr>
+        <p:spPr>
+          <a:xfrm>
+            <a:off x="406301" y="1787575"/>
+            <a:ext cx="8498026" cy="213271"/>
+          </a:xfrm>
+          <a:prstGeom prst="rect">
+            <a:avLst/>
+          </a:prstGeom>
+          <a:noFill/>
+          <a:ln/>
+        </p:spPr>
+        <p:txBody>
+          <a:bodyPr wrap="square" lIns="0" tIns="0" rIns="0" bIns="0" rtlCol="0" anchor="t"/>
+          <a:lstStyle/>
+          <a:p>
+            <a:pPr algn="l" indent="0" marL="0">
+              <a:lnSpc>
+                <a:spcPts val="1680"/>
+              </a:lnSpc>
+              <a:spcBef>
+                <a:spcPts val="300"/>
+              </a:spcBef>
+              <a:spcAft>
+                <a:spcPts val="300"/>
+              </a:spcAft>
+              <a:buNone/>
+            </a:pPr>
+            <a:r>
+              <a:rPr lang="en-US" sz="1200" b="1" dirty="0">
+                <a:solidFill>
+                  <a:srgbClr val="2C2C2C"/>
+                </a:solidFill>
+                <a:latin typeface="Verdana" pitchFamily="34" charset="0"/>
+                <a:ea typeface="Verdana" pitchFamily="34" charset="-122"/>
+                <a:cs typeface="Verdana" pitchFamily="34" charset="-120"/>
+              </a:rPr>
+              <a:t>Pitta (fire friend):</a:t>
+            </a:r>
+            <a:endParaRPr lang="en-US" sz="1200" dirty="0"/>
+          </a:p>
+        </p:txBody>
+      </p:sp>
+      <p:sp>
+        <p:nvSpPr>
+          <p:cNvPr id="7" name="Text 5"/>
+          <p:cNvSpPr/>
+          <p:nvPr/>
+        </p:nvSpPr>
+        <p:spPr>
+          <a:xfrm>
+            <a:off x="634901" y="2089696"/>
+            <a:ext cx="8102798" cy="525661"/>
+          </a:xfrm>
+          <a:prstGeom prst="rect">
+            <a:avLst/>
+          </a:prstGeom>
+          <a:noFill/>
+          <a:ln/>
+        </p:spPr>
+        <p:txBody>
+          <a:bodyPr wrap="square" lIns="0" tIns="0" rIns="0" bIns="0" rtlCol="0" anchor="t"/>
+          <a:lstStyle/>
+          <a:p>
+            <a:pPr algn="l" marL="342900" indent="-342900">
+              <a:lnSpc>
+                <a:spcPts val="1620"/>
+              </a:lnSpc>
+              <a:spcAft>
+                <a:spcPts val="300"/>
+              </a:spcAft>
+              <a:buSzPct val="100000"/>
+              <a:buChar char="•"/>
+            </a:pPr>
+            <a:r>
+              <a:rPr lang="en-US" sz="1200" dirty="0">
+                <a:solidFill>
+                  <a:srgbClr val="2C2C2C"/>
+                </a:solidFill>
+                <a:latin typeface="Verdana" pitchFamily="34" charset="0"/>
+                <a:ea typeface="Verdana" pitchFamily="34" charset="-122"/>
+                <a:cs typeface="Verdana" pitchFamily="34" charset="-120"/>
+              </a:rPr>
+              <a:t>Makes your food into energy.</a:t>
+            </a:r>
+            <a:endParaRPr lang="en-US" sz="1200" dirty="0"/>
+          </a:p>
+          <a:p>
+            <a:pPr algn="l" marL="342900" indent="-342900">
+              <a:lnSpc>
+                <a:spcPts val="1620"/>
+              </a:lnSpc>
+              <a:spcAft>
+                <a:spcPts val="300"/>
+              </a:spcAft>
+              <a:buSzPct val="100000"/>
+              <a:buChar char="•"/>
+            </a:pPr>
+            <a:r>
+              <a:rPr lang="en-US" sz="1200" dirty="0">
+                <a:solidFill>
+                  <a:srgbClr val="2C2C2C"/>
+                </a:solidFill>
+                <a:latin typeface="Verdana" pitchFamily="34" charset="0"/>
+                <a:ea typeface="Verdana" pitchFamily="34" charset="-122"/>
+                <a:cs typeface="Verdana" pitchFamily="34" charset="-120"/>
+              </a:rPr>
+              <a:t>People with lots of Pitta are sharp, focused, can be a bit fiery.</a:t>
+            </a:r>
+            <a:endParaRPr lang="en-US" sz="1200" dirty="0"/>
+          </a:p>
+        </p:txBody>
+      </p:sp>
+      <p:sp>
+        <p:nvSpPr>
+          <p:cNvPr id="8" name="Text 6"/>
           <p:cNvSpPr/>
           <p:nvPr/>
         </p:nvSpPr>
@@ -4176,7 +4954,7 @@
                 <a:ea typeface="Georgia" pitchFamily="34" charset="-122"/>
                 <a:cs typeface="Georgia" pitchFamily="34" charset="-120"/>
               </a:rPr>
-              <a:t>Wrap-up (2 min)</a:t>
+              <a:t>Story (10 min) (cont.)</a:t>
             </a:r>
             <a:endParaRPr lang="en-US" sz="1800" dirty="0"/>
           </a:p>
@@ -4190,8 +4968,8 @@
         </p:nvSpPr>
         <p:spPr>
           <a:xfrm>
-            <a:off x="634901" y="883593"/>
-            <a:ext cx="8102798" cy="281880"/>
+            <a:off x="406301" y="870942"/>
+            <a:ext cx="8498026" cy="213271"/>
           </a:xfrm>
           <a:prstGeom prst="rect">
             <a:avLst/>
@@ -4203,18 +4981,20 @@
           <a:bodyPr wrap="square" lIns="0" tIns="0" rIns="0" bIns="0" rtlCol="0" anchor="t"/>
           <a:lstStyle/>
           <a:p>
-            <a:pPr algn="l" marL="342900" indent="-342900">
-              <a:lnSpc>
-                <a:spcPts val="1620"/>
-              </a:lnSpc>
-              <a:spcAft>
-                <a:spcPts val="300"/>
-              </a:spcAft>
-              <a:buSzPct val="100000"/>
-              <a:buChar char="•"/>
-            </a:pPr>
-            <a:r>
-              <a:rPr lang="en-US" sz="1200" i="1" dirty="0">
+            <a:pPr algn="l" indent="0" marL="0">
+              <a:lnSpc>
+                <a:spcPts val="1680"/>
+              </a:lnSpc>
+              <a:spcBef>
+                <a:spcPts val="300"/>
+              </a:spcBef>
+              <a:spcAft>
+                <a:spcPts val="300"/>
+              </a:spcAft>
+              <a:buNone/>
+            </a:pPr>
+            <a:r>
+              <a:rPr lang="en-US" sz="1200" b="1" dirty="0">
                 <a:solidFill>
                   <a:srgbClr val="2C2C2C"/>
                 </a:solidFill>
@@ -4222,7 +5002,7 @@
                 <a:ea typeface="Verdana" pitchFamily="34" charset="-122"/>
                 <a:cs typeface="Verdana" pitchFamily="34" charset="-120"/>
               </a:rPr>
-              <a:t>"Tomorrow we sing about all 5 gifts together!"</a:t>
+              <a:t>Kapha (water/earth friend):</a:t>
             </a:r>
             <a:endParaRPr lang="en-US" sz="1200" dirty="0"/>
           </a:p>
@@ -4231,6 +5011,124 @@
       <p:sp>
         <p:nvSpPr>
           <p:cNvPr id="5" name="Text 3"/>
+          <p:cNvSpPr/>
+          <p:nvPr/>
+        </p:nvSpPr>
+        <p:spPr>
+          <a:xfrm>
+            <a:off x="634901" y="1173063"/>
+            <a:ext cx="8102798" cy="525661"/>
+          </a:xfrm>
+          <a:prstGeom prst="rect">
+            <a:avLst/>
+          </a:prstGeom>
+          <a:noFill/>
+          <a:ln/>
+        </p:spPr>
+        <p:txBody>
+          <a:bodyPr wrap="square" lIns="0" tIns="0" rIns="0" bIns="0" rtlCol="0" anchor="t"/>
+          <a:lstStyle/>
+          <a:p>
+            <a:pPr algn="l" marL="342900" indent="-342900">
+              <a:lnSpc>
+                <a:spcPts val="1620"/>
+              </a:lnSpc>
+              <a:spcAft>
+                <a:spcPts val="300"/>
+              </a:spcAft>
+              <a:buSzPct val="100000"/>
+              <a:buChar char="•"/>
+            </a:pPr>
+            <a:r>
+              <a:rPr lang="en-US" sz="1200" dirty="0">
+                <a:solidFill>
+                  <a:srgbClr val="2C2C2C"/>
+                </a:solidFill>
+                <a:latin typeface="Verdana" pitchFamily="34" charset="0"/>
+                <a:ea typeface="Verdana" pitchFamily="34" charset="-122"/>
+                <a:cs typeface="Verdana" pitchFamily="34" charset="-120"/>
+              </a:rPr>
+              <a:t>Keeps you strong and steady.</a:t>
+            </a:r>
+            <a:endParaRPr lang="en-US" sz="1200" dirty="0"/>
+          </a:p>
+          <a:p>
+            <a:pPr algn="l" marL="342900" indent="-342900">
+              <a:lnSpc>
+                <a:spcPts val="1620"/>
+              </a:lnSpc>
+              <a:spcAft>
+                <a:spcPts val="300"/>
+              </a:spcAft>
+              <a:buSzPct val="100000"/>
+              <a:buChar char="•"/>
+            </a:pPr>
+            <a:r>
+              <a:rPr lang="en-US" sz="1200" dirty="0">
+                <a:solidFill>
+                  <a:srgbClr val="2C2C2C"/>
+                </a:solidFill>
+                <a:latin typeface="Verdana" pitchFamily="34" charset="0"/>
+                <a:ea typeface="Verdana" pitchFamily="34" charset="-122"/>
+                <a:cs typeface="Verdana" pitchFamily="34" charset="-120"/>
+              </a:rPr>
+              <a:t>People with lots of Kapha are calm, patient, sometimes slow.</a:t>
+            </a:r>
+            <a:endParaRPr lang="en-US" sz="1200" dirty="0"/>
+          </a:p>
+        </p:txBody>
+      </p:sp>
+      <p:sp>
+        <p:nvSpPr>
+          <p:cNvPr id="6" name="Text 4"/>
+          <p:cNvSpPr/>
+          <p:nvPr/>
+        </p:nvSpPr>
+        <p:spPr>
+          <a:xfrm>
+            <a:off x="406301" y="1787575"/>
+            <a:ext cx="8498026" cy="213271"/>
+          </a:xfrm>
+          <a:prstGeom prst="rect">
+            <a:avLst/>
+          </a:prstGeom>
+          <a:noFill/>
+          <a:ln/>
+        </p:spPr>
+        <p:txBody>
+          <a:bodyPr wrap="square" lIns="0" tIns="0" rIns="0" bIns="0" rtlCol="0" anchor="t"/>
+          <a:lstStyle/>
+          <a:p>
+            <a:pPr algn="l" indent="0" marL="0">
+              <a:lnSpc>
+                <a:spcPts val="1680"/>
+              </a:lnSpc>
+              <a:spcBef>
+                <a:spcPts val="300"/>
+              </a:spcBef>
+              <a:spcAft>
+                <a:spcPts val="300"/>
+              </a:spcAft>
+              <a:buNone/>
+            </a:pPr>
+            <a:r>
+              <a:rPr lang="en-US" sz="1200" i="1" dirty="0">
+                <a:solidFill>
+                  <a:srgbClr val="2C2C2C"/>
+                </a:solidFill>
+                <a:latin typeface="Verdana" pitchFamily="34" charset="0"/>
+                <a:ea typeface="Verdana" pitchFamily="34" charset="-122"/>
+                <a:cs typeface="Verdana" pitchFamily="34" charset="-120"/>
+              </a:rPr>
+              <a:t>"None of these is 'good' or 'bad' — they're all friends. The trick is keeping them in balance."</a:t>
+            </a:r>
+            <a:endParaRPr lang="en-US" sz="1200" dirty="0"/>
+          </a:p>
+        </p:txBody>
+      </p:sp>
+      <p:sp>
+        <p:nvSpPr>
+          <p:cNvPr id="7" name="Text 5"/>
           <p:cNvSpPr/>
           <p:nvPr/>
         </p:nvSpPr>
@@ -4380,7 +5278,7 @@
                 <a:ea typeface="Georgia" pitchFamily="34" charset="-122"/>
                 <a:cs typeface="Georgia" pitchFamily="34" charset="-120"/>
               </a:rPr>
-              <a:t>Homework</a:t>
+              <a:t>Drawing (12 min)</a:t>
             </a:r>
             <a:endParaRPr lang="en-US" sz="1800" dirty="0"/>
           </a:p>
@@ -4428,7 +5326,7 @@
                 <a:ea typeface="Verdana" pitchFamily="34" charset="-122"/>
                 <a:cs typeface="Verdana" pitchFamily="34" charset="-120"/>
               </a:rPr>
-              <a:t>– Ask a parent: which of the three friends do they think is YOUR favourite?</a:t>
+              <a:t>Each child draws their three friends. They can give them faces, names, anything!</a:t>
             </a:r>
             <a:endParaRPr lang="en-US" sz="1200" dirty="0"/>
           </a:p>
